--- a/public/fun/pack/pptx/familypro/가족소개프리미엄_47_아이와함께_다크로즈골드.pptx
+++ b/public/fun/pack/pptx/familypro/가족소개프리미엄_47_아이와함께_다크로즈골드.pptx
@@ -113,12 +113,12 @@
   <p:extLst>
     <p:ext uri="{521415D9-36F7-43E2-AB2F-B90AF26B5E84}">
       <p14:sectionLst xmlns:p14="http://schemas.microsoft.com/office/powerpoint/2010/main">
-        <p14:section name="시작" id="{3AF6E2FB-14CF-48D3-9648-2993C69CDC0C}">
+        <p14:section name="시작" id="{1925D861-7334-42FA-87EF-6E5CB6942C79}">
           <p14:sldIdLst>
             <p14:sldId id="256"/>
           </p14:sldIdLst>
         </p14:section>
-        <p14:section name="본문" id="{2C90ADE0-DF3E-46B4-B260-9D12AFF4B591}">
+        <p14:section name="본문" id="{2F5ED415-9545-4A34-AFE1-72E55EEC4273}">
           <p14:sldIdLst>
             <p14:sldId id="257"/>
             <p14:sldId id="258"/>
@@ -127,7 +127,7 @@
             <p14:sldId id="261"/>
           </p14:sldIdLst>
         </p14:section>
-        <p14:section name="마무리" id="{33E44E9B-ED3E-48C0-B7C3-4F24F597AC28}">
+        <p14:section name="마무리" id="{E7082A8E-C89E-4FDC-B427-1FC28D59ED1C}">
           <p14:sldIdLst>
             <p14:sldId id="262"/>
           </p14:sldIdLst>
@@ -1571,7 +1571,7 @@
             </a:lvl1pPr>
           </a:lstStyle>
           <a:p>
-            <a:fld id="{23EF0006-9DA8-4230-B7F7-CF7A15140AE2}" type="slidenum">
+            <a:fld id="{72C58C89-A670-4CFF-8028-A7215173991C}" type="slidenum">
               <a:rPr lang="en-US"/>
               <a:t>‹#›</a:t>
             </a:fld>
@@ -2229,7 +2229,7 @@
             </a:lvl1pPr>
           </a:lstStyle>
           <a:p>
-            <a:fld id="{E1226064-4420-4552-A22A-C5E261324A45}" type="slidenum">
+            <a:fld id="{4F2F1F92-DDAA-4A56-8D00-51FA68B3DA08}" type="slidenum">
               <a:rPr lang="en-US"/>
               <a:t>‹#›</a:t>
             </a:fld>
@@ -2855,7 +2855,7 @@
             </a:lvl1pPr>
           </a:lstStyle>
           <a:p>
-            <a:fld id="{8DE90BDD-03EE-4280-BCB9-3C91F0DE558B}" type="slidenum">
+            <a:fld id="{74F65F31-0B0C-490D-9CB2-9311DED9DCFF}" type="slidenum">
               <a:rPr lang="en-US"/>
               <a:t>‹#›</a:t>
             </a:fld>
@@ -3686,7 +3686,7 @@
           <a:p>
             <a:r>
               <a:rPr lang="ko-KR"/>
-              <a:t>성탄 카드 부치러 간 우체국 앞</a:t>
+              <a:t>성탄 카드 부치러 간 골목 앞</a:t>
             </a:r>
           </a:p>
         </p:txBody>
@@ -3708,7 +3708,7 @@
           <a:p>
             <a:r>
               <a:rPr lang="ko-KR"/>
-              <a:t>아이와 함께 · 0000. 00. 00</a:t>
+              <a:t>아이와 함께 · 날짜 입력</a:t>
             </a:r>
           </a:p>
         </p:txBody>
@@ -4065,7 +4065,7 @@
           <a:bodyPr/>
           <a:lstStyle/>
           <a:p>
-            <a:fld id="{22B4E54F-191A-4163-A210-E100FB697AC2}" type="slidenum">
+            <a:fld id="{A101DA47-1FD5-43E6-A6DE-D2C69D41B39F}" type="slidenum">
               <a:rPr lang="en-US"/>
               <a:t>‹#›</a:t>
             </a:fld>
@@ -4769,7 +4769,7 @@
           <a:bodyPr/>
           <a:lstStyle/>
           <a:p>
-            <a:fld id="{BA695F2F-D8B6-4AA3-8275-B5B35DAC9C9D}" type="slidenum">
+            <a:fld id="{2C6A30EC-7D64-41F8-B36C-41BCE9720038}" type="slidenum">
               <a:rPr lang="en-US"/>
               <a:t>‹#›</a:t>
             </a:fld>
@@ -5611,7 +5611,7 @@
           <a:bodyPr/>
           <a:lstStyle/>
           <a:p>
-            <a:fld id="{CBFD1937-04C4-4791-9622-D4289EE71C82}" type="slidenum">
+            <a:fld id="{A2C0B519-B246-4494-8136-84521D3A6394}" type="slidenum">
               <a:rPr lang="en-US"/>
               <a:t>‹#›</a:t>
             </a:fld>
@@ -6869,7 +6869,7 @@
           <a:bodyPr/>
           <a:lstStyle/>
           <a:p>
-            <a:fld id="{A477A322-A122-4A00-8D56-3D4F668223A5}" type="slidenum">
+            <a:fld id="{1A59A913-D18B-47EE-8549-CF91CCFEFFD0}" type="slidenum">
               <a:rPr lang="en-US"/>
               <a:t>‹#›</a:t>
             </a:fld>
@@ -6957,7 +6957,7 @@
           <a:bodyPr/>
           <a:lstStyle/>
           <a:p>
-            <a:fld id="{5D2BACB8-6F9C-47E1-88AB-49EF094F227D}" type="slidenum">
+            <a:fld id="{263D7419-CD8D-4CD0-ABA1-2933BAF7902F}" type="slidenum">
               <a:rPr lang="en-US"/>
               <a:t>‹#›</a:t>
             </a:fld>
